--- a/carpentry/intake-142/PowerPoint/Day-23_2026-12-07_Week-7.pptx
+++ b/carpentry/intake-142/PowerPoint/Day-23_2026-12-07_Week-7.pptx
@@ -1184,7 +1184,7 @@
           <a:p/>
           <a:p>
             <a:r>
-              <a:t>In Example 9.1 on page 140, the perimeter follows the outside boundary. Point to each edge as you read the expression. This prevents the common mistake of counting only one length and one width. For our floor, adding 7.2 and 3.6 reaches only halfway around; doubling completes the route. What unit belongs to that sum? Metres, because we are adding lengths. We do not square the unit unless we are multiplying dimensions to measure area. Use that boundary-versus-coverage distinction whenever you select a formula from a drawing.</a:t>
+              <a:t>In Example 9.1 on page 220, the perimeter follows the outside boundary. Point to each edge as you read the expression. This prevents the common mistake of counting only one length and one width. For our floor, adding 7.2 and 3.6 reaches only halfway around; doubling completes the route. What unit belongs to that sum? Metres, because we are adding lengths. We do not square the unit unless we are multiplying dimensions to measure area. Use that boundary-versus-coverage distinction whenever you select a formula from a drawing.</a:t>
             </a:r>
           </a:p>
         </p:txBody>
@@ -2424,7 +2424,7 @@
           <a:p/>
           <a:p>
             <a:r>
-              <a:t>Example 6.5 on page 96 shows an allowance added to an original quantity. Identify the base first, then the percentage of that base, then the total. In our task, the base is nine sheets and the added amount is ten percent of nine. What does the one in 1.10 represent? The entire original quantity. What does 0.10 represent? The additional ten percent. That explanation matters because multiplying by 0.10 alone finds only the extra amount, not the total quantity required for the order.</a:t>
+              <a:t>Example 6.5 on page 142 shows an allowance added to an original quantity. Identify the base first, then the percentage of that base, then the total. In our task, the base is nine sheets and the added amount is ten percent of nine. What does the one in 1.10 represent? The entire original quantity. What does 0.10 represent? The additional ten percent. That explanation matters because multiplying by 0.10 alone finds only the extra amount, not the total quantity required for the order.</a:t>
             </a:r>
           </a:p>
         </p:txBody>
@@ -4728,7 +4728,7 @@
                 </a:solidFill>
                 <a:latin typeface="Arial"/>
               </a:rPr>
-              <a:t>Textbook Chapter 3 pp.44–51; Chapter 9 p.140; Chapter 10 pp.154–157</a:t>
+              <a:t>Textbook Chapter 3 pp.68–75; Chapter 9 pp.220–221; Chapter 10 pp.242–245</a:t>
             </a:r>
           </a:p>
         </p:txBody>
@@ -4928,7 +4928,7 @@
                 </a:solidFill>
                 <a:latin typeface="Arial"/>
               </a:rPr>
-              <a:t>Resources: Exercise Book 10B Q1 (p.65); 3C Q3 (p.23); 12B Q5 (p.78)</a:t>
+              <a:t>Resources: Exercise Book 10B Q1 (p.95); 3C Q3 (p.29); 12B Q5 (p.117)</a:t>
             </a:r>
           </a:p>
         </p:txBody>
@@ -5542,7 +5542,7 @@
                 </a:solidFill>
                 <a:latin typeface="Arial"/>
               </a:rPr>
-              <a:t>Textbook Chapter 3 pp.44–51; Chapter 9 p.140; Chapter 10 pp.154–157</a:t>
+              <a:t>Textbook Chapter 3 pp.68–75; Chapter 9 pp.220–221; Chapter 10 pp.242–245</a:t>
             </a:r>
           </a:p>
         </p:txBody>
@@ -6273,7 +6273,7 @@
                 </a:solidFill>
                 <a:latin typeface="Arial"/>
               </a:rPr>
-              <a:t>Textbook Chapter 3 pp.44–51; Chapter 9 p.140; Chapter 10 pp.154–157</a:t>
+              <a:t>Textbook Chapter 3 pp.68–75; Chapter 9 pp.220–221; Chapter 10 pp.242–245</a:t>
             </a:r>
           </a:p>
         </p:txBody>
@@ -7007,7 +7007,7 @@
                 </a:solidFill>
                 <a:latin typeface="Arial"/>
               </a:rPr>
-              <a:t>Textbook Chapter 3 pp.44–51; Chapter 9 p.140; Chapter 10 pp.154–157</a:t>
+              <a:t>Textbook Chapter 3 pp.68–75; Chapter 9 pp.220–221; Chapter 10 pp.242–245</a:t>
             </a:r>
           </a:p>
         </p:txBody>
@@ -7207,7 +7207,7 @@
                 </a:solidFill>
                 <a:latin typeface="Arial"/>
               </a:rPr>
-              <a:t>Resources: Exercise Book 10B Q1 (p.65); 3C Q3 (p.23); 12B Q5 (p.78)</a:t>
+              <a:t>Resources: Exercise Book 10B Q1 (p.95); 3C Q3 (p.29); 12B Q5 (p.117)</a:t>
             </a:r>
           </a:p>
         </p:txBody>
@@ -7821,7 +7821,7 @@
                 </a:solidFill>
                 <a:latin typeface="Arial"/>
               </a:rPr>
-              <a:t>Textbook Chapter 3 pp.44–51; Chapter 9 p.140; Chapter 10 pp.154–157</a:t>
+              <a:t>Textbook Chapter 3 pp.68–75; Chapter 9 pp.220–221; Chapter 10 pp.242–245</a:t>
             </a:r>
           </a:p>
         </p:txBody>
@@ -8597,7 +8597,7 @@
                 </a:solidFill>
                 <a:latin typeface="Arial"/>
               </a:rPr>
-              <a:t>Textbook Chapter 3 pp.44–51; Chapter 9 p.140; Chapter 10 pp.154–157</a:t>
+              <a:t>Textbook Chapter 3 pp.68–75; Chapter 9 pp.220–221; Chapter 10 pp.242–245</a:t>
             </a:r>
           </a:p>
         </p:txBody>
@@ -9556,7 +9556,7 @@
                 </a:solidFill>
                 <a:latin typeface="Arial"/>
               </a:rPr>
-              <a:t>Textbook Chapter 3 pp.44–51; Chapter 9 p.140; Chapter 10 pp.154–157</a:t>
+              <a:t>Textbook Chapter 3 pp.68–75; Chapter 9 pp.220–221; Chapter 10 pp.242–245</a:t>
             </a:r>
           </a:p>
         </p:txBody>
@@ -10242,7 +10242,7 @@
                 </a:solidFill>
                 <a:latin typeface="Arial"/>
               </a:rPr>
-              <a:t>Textbook Chapter 3 pp.44–51; Chapter 9 p.140; Chapter 10 pp.154–157</a:t>
+              <a:t>Textbook Chapter 3 pp.68–75; Chapter 9 pp.220–221; Chapter 10 pp.242–245</a:t>
             </a:r>
           </a:p>
         </p:txBody>
@@ -10442,7 +10442,7 @@
                 </a:solidFill>
                 <a:latin typeface="Arial"/>
               </a:rPr>
-              <a:t>Resources: Exercise Book 10B Q1 (p.65); 3C Q3 (p.23); 12B Q5 (p.78)</a:t>
+              <a:t>Resources: Exercise Book 10B Q1 (p.95); 3C Q3 (p.29); 12B Q5 (p.117)</a:t>
             </a:r>
           </a:p>
         </p:txBody>
@@ -11056,7 +11056,7 @@
                 </a:solidFill>
                 <a:latin typeface="Arial"/>
               </a:rPr>
-              <a:t>Textbook Chapter 3 pp.44–51; Chapter 9 p.140; Chapter 10 pp.154–157</a:t>
+              <a:t>Textbook Chapter 3 pp.68–75; Chapter 9 pp.220–221; Chapter 10 pp.242–245</a:t>
             </a:r>
           </a:p>
         </p:txBody>
@@ -11256,7 +11256,7 @@
                 </a:solidFill>
                 <a:latin typeface="Arial"/>
               </a:rPr>
-              <a:t>Resources: Exercise Book 10B Q1 (p.65); 3C Q3 (p.23); 12B Q5 (p.78)</a:t>
+              <a:t>Resources: Exercise Book 10B Q1 (p.95); 3C Q3 (p.29); 12B Q5 (p.117)</a:t>
             </a:r>
           </a:p>
         </p:txBody>
@@ -15887,7 +15887,7 @@
                 </a:solidFill>
                 <a:latin typeface="Arial"/>
               </a:rPr>
-              <a:t>Textbook sections 6.4 pp.96–97; Chapter 10 pp.154–164</a:t>
+              <a:t>Textbook sections 6.4 pp.142–143; Chapter 10 pp.242–254</a:t>
             </a:r>
           </a:p>
         </p:txBody>
@@ -16087,7 +16087,7 @@
                 </a:solidFill>
                 <a:latin typeface="Arial"/>
               </a:rPr>
-              <a:t>Textbook sections 6.4 pp.96–97; Chapter 10 pp.154–164</a:t>
+              <a:t>Textbook sections 6.4 pp.142–143; Chapter 10 pp.242–254</a:t>
             </a:r>
           </a:p>
         </p:txBody>
@@ -16135,7 +16135,7 @@
                 </a:solidFill>
                 <a:latin typeface="Arial"/>
               </a:rPr>
-              <a:t>Exercise Book 10B Q1–2 (p.65); 6B Q2 (p.41)</a:t>
+              <a:t>Exercise Book 10B Q1–2 (p.95); 6B Q2 (p.57)</a:t>
             </a:r>
           </a:p>
         </p:txBody>
@@ -16797,7 +16797,7 @@
                 </a:solidFill>
                 <a:latin typeface="Arial"/>
               </a:rPr>
-              <a:t>Textbook sections 6.4 pp.96–97; Chapter 10 pp.154–164</a:t>
+              <a:t>Textbook sections 6.4 pp.142–143; Chapter 10 pp.242–254</a:t>
             </a:r>
           </a:p>
         </p:txBody>
@@ -16997,7 +16997,7 @@
                 </a:solidFill>
                 <a:latin typeface="Arial"/>
               </a:rPr>
-              <a:t>Resources: Exercise Book 10B Q1–2 (p.65); 6B Q2 (p.41)</a:t>
+              <a:t>Resources: Exercise Book 10B Q1–2 (p.95); 6B Q2 (p.57)</a:t>
             </a:r>
           </a:p>
         </p:txBody>
@@ -17746,7 +17746,7 @@
                 </a:solidFill>
                 <a:latin typeface="Arial"/>
               </a:rPr>
-              <a:t>Textbook sections 6.4 pp.96–97; Chapter 10 pp.154–164</a:t>
+              <a:t>Textbook sections 6.4 pp.142–143; Chapter 10 pp.242–254</a:t>
             </a:r>
           </a:p>
         </p:txBody>
@@ -18967,7 +18967,7 @@
                 </a:solidFill>
                 <a:latin typeface="Arial"/>
               </a:rPr>
-              <a:t>Textbook sections 6.4 pp.96–97; Chapter 10 pp.154–164</a:t>
+              <a:t>Textbook sections 6.4 pp.142–143; Chapter 10 pp.242–254</a:t>
             </a:r>
           </a:p>
         </p:txBody>
@@ -21086,7 +21086,7 @@
                 </a:solidFill>
                 <a:latin typeface="Arial"/>
               </a:rPr>
-              <a:t>Textbook  |  page 96</a:t>
+              <a:t>Textbook  |  page 142</a:t>
             </a:r>
           </a:p>
         </p:txBody>
@@ -21134,7 +21134,7 @@
                 </a:solidFill>
                 <a:latin typeface="Arial"/>
               </a:rPr>
-              <a:t>Textbook sections 6.4 pp.96–97; Chapter 10 pp.154–164</a:t>
+              <a:t>Textbook sections 6.4 pp.142–143; Chapter 10 pp.242–254</a:t>
             </a:r>
           </a:p>
         </p:txBody>
@@ -21772,7 +21772,7 @@
                 </a:solidFill>
                 <a:latin typeface="Arial"/>
               </a:rPr>
-              <a:t>Textbook  |  page 96</a:t>
+              <a:t>Textbook  |  page 142</a:t>
             </a:r>
           </a:p>
         </p:txBody>
@@ -21820,7 +21820,7 @@
                 </a:solidFill>
                 <a:latin typeface="Arial"/>
               </a:rPr>
-              <a:t>Textbook sections 6.4 pp.96–97; Chapter 10 pp.154–164</a:t>
+              <a:t>Textbook sections 6.4 pp.142–143; Chapter 10 pp.242–254</a:t>
             </a:r>
           </a:p>
         </p:txBody>
@@ -22506,7 +22506,7 @@
                 </a:solidFill>
                 <a:latin typeface="Arial"/>
               </a:rPr>
-              <a:t>Textbook sections 6.4 pp.96–97; Chapter 10 pp.154–164</a:t>
+              <a:t>Textbook sections 6.4 pp.142–143; Chapter 10 pp.242–254</a:t>
             </a:r>
           </a:p>
         </p:txBody>
@@ -23264,7 +23264,7 @@
                 </a:solidFill>
                 <a:latin typeface="Arial"/>
               </a:rPr>
-              <a:t>Textbook sections 6.4 pp.96–97; Chapter 10 pp.154–164</a:t>
+              <a:t>Textbook sections 6.4 pp.142–143; Chapter 10 pp.242–254</a:t>
             </a:r>
           </a:p>
         </p:txBody>
@@ -23464,7 +23464,7 @@
                 </a:solidFill>
                 <a:latin typeface="Arial"/>
               </a:rPr>
-              <a:t>Resources: Exercise Book 10B Q1–2 (p.65); 6B Q2 (p.41)</a:t>
+              <a:t>Resources: Exercise Book 10B Q1–2 (p.95); 6B Q2 (p.57)</a:t>
             </a:r>
           </a:p>
         </p:txBody>
@@ -24078,7 +24078,7 @@
                 </a:solidFill>
                 <a:latin typeface="Arial"/>
               </a:rPr>
-              <a:t>Textbook sections 6.4 pp.96–97; Chapter 10 pp.154–164</a:t>
+              <a:t>Textbook sections 6.4 pp.142–143; Chapter 10 pp.242–254</a:t>
             </a:r>
           </a:p>
         </p:txBody>
@@ -24278,7 +24278,7 @@
                 </a:solidFill>
                 <a:latin typeface="Arial"/>
               </a:rPr>
-              <a:t>Resources: Exercise Book 10B Q1–2 (p.65); 6B Q2 (p.41)</a:t>
+              <a:t>Resources: Exercise Book 10B Q1–2 (p.95); 6B Q2 (p.57)</a:t>
             </a:r>
           </a:p>
         </p:txBody>
@@ -24847,7 +24847,7 @@
                 </a:solidFill>
                 <a:latin typeface="Arial"/>
               </a:rPr>
-              <a:t>Textbook Chapter 3 pp.44–51; Chapter 9 p.140; Chapter 10 pp.154–157</a:t>
+              <a:t>Textbook Chapter 3 pp.68–75; Chapter 9 pp.220–221; Chapter 10 pp.242–245</a:t>
             </a:r>
           </a:p>
         </p:txBody>
@@ -25047,7 +25047,7 @@
                 </a:solidFill>
                 <a:latin typeface="Arial"/>
               </a:rPr>
-              <a:t>Textbook Chapter 3 pp.44–51; Chapter 9 p.140; Chapter 10 pp.154–157</a:t>
+              <a:t>Textbook Chapter 3 pp.68–75; Chapter 9 pp.220–221; Chapter 10 pp.242–245</a:t>
             </a:r>
           </a:p>
         </p:txBody>
@@ -25095,7 +25095,7 @@
                 </a:solidFill>
                 <a:latin typeface="Arial"/>
               </a:rPr>
-              <a:t>Exercise Book 10B Q1 (p.65); 3C Q3 (p.23); 12B Q5 (p.78)</a:t>
+              <a:t>Exercise Book 10B Q1 (p.95); 3C Q3 (p.29); 12B Q5 (p.117)</a:t>
             </a:r>
           </a:p>
         </p:txBody>
@@ -25757,7 +25757,7 @@
                 </a:solidFill>
                 <a:latin typeface="Arial"/>
               </a:rPr>
-              <a:t>Textbook sections 6.4 pp.96–97; Chapter 10 pp.154–164</a:t>
+              <a:t>Textbook sections 6.4 pp.142–143; Chapter 10 pp.242–254</a:t>
             </a:r>
           </a:p>
         </p:txBody>
@@ -26533,7 +26533,7 @@
                 </a:solidFill>
                 <a:latin typeface="Arial"/>
               </a:rPr>
-              <a:t>Textbook sections 6.4 pp.96–97; Chapter 10 pp.154–164</a:t>
+              <a:t>Textbook sections 6.4 pp.142–143; Chapter 10 pp.242–254</a:t>
             </a:r>
           </a:p>
         </p:txBody>
@@ -27492,7 +27492,7 @@
                 </a:solidFill>
                 <a:latin typeface="Arial"/>
               </a:rPr>
-              <a:t>Textbook sections 6.4 pp.96–97; Chapter 10 pp.154–164</a:t>
+              <a:t>Textbook sections 6.4 pp.142–143; Chapter 10 pp.242–254</a:t>
             </a:r>
           </a:p>
         </p:txBody>
@@ -28203,7 +28203,7 @@
                 </a:solidFill>
                 <a:latin typeface="Arial"/>
               </a:rPr>
-              <a:t>Textbook sections 6.4 pp.96–97; Chapter 10 pp.154–164</a:t>
+              <a:t>Textbook sections 6.4 pp.142–143; Chapter 10 pp.242–254</a:t>
             </a:r>
           </a:p>
         </p:txBody>
@@ -28403,7 +28403,7 @@
                 </a:solidFill>
                 <a:latin typeface="Arial"/>
               </a:rPr>
-              <a:t>Resources: Exercise Book 10B Q1–2 (p.65); 6B Q2 (p.41)</a:t>
+              <a:t>Resources: Exercise Book 10B Q1–2 (p.95); 6B Q2 (p.57)</a:t>
             </a:r>
           </a:p>
         </p:txBody>
@@ -29017,7 +29017,7 @@
                 </a:solidFill>
                 <a:latin typeface="Arial"/>
               </a:rPr>
-              <a:t>Textbook sections 6.4 pp.96–97; Chapter 10 pp.154–164</a:t>
+              <a:t>Textbook sections 6.4 pp.142–143; Chapter 10 pp.242–254</a:t>
             </a:r>
           </a:p>
         </p:txBody>
@@ -29217,7 +29217,7 @@
                 </a:solidFill>
                 <a:latin typeface="Arial"/>
               </a:rPr>
-              <a:t>Resources: Exercise Book 10B Q1–2 (p.65); 6B Q2 (p.41)</a:t>
+              <a:t>Resources: Exercise Book 10B Q1–2 (p.95); 6B Q2 (p.57)</a:t>
             </a:r>
           </a:p>
         </p:txBody>
@@ -29831,7 +29831,7 @@
                 </a:solidFill>
                 <a:latin typeface="Arial"/>
               </a:rPr>
-              <a:t>Textbook Chapter 3 pp.44–51; Chapter 9 p.140; Chapter 10 pp.154–157</a:t>
+              <a:t>Textbook Chapter 3 pp.68–75; Chapter 9 pp.220–221; Chapter 10 pp.242–245</a:t>
             </a:r>
           </a:p>
         </p:txBody>
@@ -30031,7 +30031,7 @@
                 </a:solidFill>
                 <a:latin typeface="Arial"/>
               </a:rPr>
-              <a:t>Resources: Exercise Book 10B Q1 (p.65); 3C Q3 (p.23); 12B Q5 (p.78)</a:t>
+              <a:t>Resources: Exercise Book 10B Q1 (p.95); 3C Q3 (p.29); 12B Q5 (p.117)</a:t>
             </a:r>
           </a:p>
         </p:txBody>
@@ -30780,7 +30780,7 @@
                 </a:solidFill>
                 <a:latin typeface="Arial"/>
               </a:rPr>
-              <a:t>Textbook Chapter 3 pp.44–51; Chapter 9 p.140; Chapter 10 pp.154–157</a:t>
+              <a:t>Textbook Chapter 3 pp.68–75; Chapter 9 pp.220–221; Chapter 10 pp.242–245</a:t>
             </a:r>
           </a:p>
         </p:txBody>
@@ -32001,7 +32001,7 @@
                 </a:solidFill>
                 <a:latin typeface="Arial"/>
               </a:rPr>
-              <a:t>Textbook Chapter 3 pp.44–51; Chapter 9 p.140; Chapter 10 pp.154–157</a:t>
+              <a:t>Textbook Chapter 3 pp.68–75; Chapter 9 pp.220–221; Chapter 10 pp.242–245</a:t>
             </a:r>
           </a:p>
         </p:txBody>
@@ -33949,7 +33949,7 @@
                 </a:solidFill>
                 <a:latin typeface="Arial"/>
               </a:rPr>
-              <a:t>Textbook  |  page 140</a:t>
+              <a:t>Textbook  |  page 220</a:t>
             </a:r>
           </a:p>
         </p:txBody>
@@ -33997,7 +33997,7 @@
                 </a:solidFill>
                 <a:latin typeface="Arial"/>
               </a:rPr>
-              <a:t>Textbook Chapter 3 pp.44–51; Chapter 9 p.140; Chapter 10 pp.154–157</a:t>
+              <a:t>Textbook Chapter 3 pp.68–75; Chapter 9 pp.220–221; Chapter 10 pp.242–245</a:t>
             </a:r>
           </a:p>
         </p:txBody>
@@ -34683,7 +34683,7 @@
                 </a:solidFill>
                 <a:latin typeface="Arial"/>
               </a:rPr>
-              <a:t>Textbook Chapter 3 pp.44–51; Chapter 9 p.140; Chapter 10 pp.154–157</a:t>
+              <a:t>Textbook Chapter 3 pp.68–75; Chapter 9 pp.220–221; Chapter 10 pp.242–245</a:t>
             </a:r>
           </a:p>
         </p:txBody>

--- a/carpentry/intake-142/PowerPoint/Day-23_2026-12-07_Week-7.pptx
+++ b/carpentry/intake-142/PowerPoint/Day-23_2026-12-07_Week-7.pptx
@@ -11529,6 +11529,104 @@
           </a:p>
         </p:txBody>
       </p:sp>
+      <p:sp>
+        <p:nvSpPr>
+          <p:cNvPr id="22" name="Play quiz W07-L01"/>
+          <p:cNvSpPr txBox="1"/>
+          <p:nvPr/>
+        </p:nvSpPr>
+        <p:spPr>
+          <a:xfrm>
+            <a:off x="6355080" y="6606540"/>
+            <a:ext cx="822960" cy="210312"/>
+          </a:xfrm>
+          <a:prstGeom prst="rect">
+            <a:avLst/>
+          </a:prstGeom>
+          <a:noFill/>
+        </p:spPr>
+        <p:txBody>
+          <a:bodyPr wrap="square" lIns="0" rIns="0" tIns="0" bIns="0" anchor="t">
+            <a:normAutofit fontScale="100000" lnSpcReduction="0"/>
+          </a:bodyPr>
+          <a:lstStyle/>
+          <a:p>
+            <a:pPr>
+              <a:spcBef>
+                <a:spcPts val="0"/>
+              </a:spcBef>
+              <a:spcAft>
+                <a:spcPts val="0"/>
+              </a:spcAft>
+              <a:defRPr sz="1000" b="0">
+                <a:solidFill>
+                  <a:srgbClr val="D0002B"/>
+                </a:solidFill>
+                <a:latin typeface="Arial"/>
+              </a:defRPr>
+            </a:pPr>
+            <a:r>
+              <a:rPr sz="1000">
+                <a:solidFill>
+                  <a:srgbClr val="F7F8FC"/>
+                </a:solidFill>
+                <a:latin typeface="Arial"/>
+                <a:hlinkClick r:id="rId8"/>
+              </a:rPr>
+              <a:t>Play quiz</a:t>
+            </a:r>
+          </a:p>
+        </p:txBody>
+      </p:sp>
+      <p:sp>
+        <p:nvSpPr>
+          <p:cNvPr id="23" name="Quiz PDF W07-L01"/>
+          <p:cNvSpPr txBox="1"/>
+          <p:nvPr/>
+        </p:nvSpPr>
+        <p:spPr>
+          <a:xfrm>
+            <a:off x="7296912" y="6606540"/>
+            <a:ext cx="1005840" cy="210312"/>
+          </a:xfrm>
+          <a:prstGeom prst="rect">
+            <a:avLst/>
+          </a:prstGeom>
+          <a:noFill/>
+        </p:spPr>
+        <p:txBody>
+          <a:bodyPr wrap="square" lIns="0" rIns="0" tIns="0" bIns="0" anchor="t">
+            <a:normAutofit fontScale="100000" lnSpcReduction="0"/>
+          </a:bodyPr>
+          <a:lstStyle/>
+          <a:p>
+            <a:pPr>
+              <a:spcBef>
+                <a:spcPts val="0"/>
+              </a:spcBef>
+              <a:spcAft>
+                <a:spcPts val="0"/>
+              </a:spcAft>
+              <a:defRPr sz="1000" b="0">
+                <a:solidFill>
+                  <a:srgbClr val="D0002B"/>
+                </a:solidFill>
+                <a:latin typeface="Arial"/>
+              </a:defRPr>
+            </a:pPr>
+            <a:r>
+              <a:rPr sz="1000">
+                <a:solidFill>
+                  <a:srgbClr val="F7F8FC"/>
+                </a:solidFill>
+                <a:latin typeface="Arial"/>
+                <a:hlinkClick r:id="rId9"/>
+              </a:rPr>
+              <a:t>Quiz PDF</a:t>
+            </a:r>
+          </a:p>
+        </p:txBody>
+      </p:sp>
     </p:spTree>
   </p:cSld>
   <p:clrMapOvr>
@@ -29486,6 +29584,104 @@
                 <a:latin typeface="Arial"/>
               </a:rPr>
               <a:t>Day 23  •  2026-12-07  •  34</a:t>
+            </a:r>
+          </a:p>
+        </p:txBody>
+      </p:sp>
+      <p:sp>
+        <p:nvSpPr>
+          <p:cNvPr id="22" name="Play quiz W07-L02"/>
+          <p:cNvSpPr txBox="1"/>
+          <p:nvPr/>
+        </p:nvSpPr>
+        <p:spPr>
+          <a:xfrm>
+            <a:off x="6355080" y="6606540"/>
+            <a:ext cx="822960" cy="210312"/>
+          </a:xfrm>
+          <a:prstGeom prst="rect">
+            <a:avLst/>
+          </a:prstGeom>
+          <a:noFill/>
+        </p:spPr>
+        <p:txBody>
+          <a:bodyPr wrap="square" lIns="0" rIns="0" tIns="0" bIns="0" anchor="t">
+            <a:normAutofit fontScale="100000" lnSpcReduction="0"/>
+          </a:bodyPr>
+          <a:lstStyle/>
+          <a:p>
+            <a:pPr>
+              <a:spcBef>
+                <a:spcPts val="0"/>
+              </a:spcBef>
+              <a:spcAft>
+                <a:spcPts val="0"/>
+              </a:spcAft>
+              <a:defRPr sz="1000" b="0">
+                <a:solidFill>
+                  <a:srgbClr val="D0002B"/>
+                </a:solidFill>
+                <a:latin typeface="Arial"/>
+              </a:defRPr>
+            </a:pPr>
+            <a:r>
+              <a:rPr sz="1000">
+                <a:solidFill>
+                  <a:srgbClr val="F7F8FC"/>
+                </a:solidFill>
+                <a:latin typeface="Arial"/>
+                <a:hlinkClick r:id="rId8"/>
+              </a:rPr>
+              <a:t>Play quiz</a:t>
+            </a:r>
+          </a:p>
+        </p:txBody>
+      </p:sp>
+      <p:sp>
+        <p:nvSpPr>
+          <p:cNvPr id="23" name="Quiz PDF W07-L02"/>
+          <p:cNvSpPr txBox="1"/>
+          <p:nvPr/>
+        </p:nvSpPr>
+        <p:spPr>
+          <a:xfrm>
+            <a:off x="7296912" y="6606540"/>
+            <a:ext cx="1005840" cy="210312"/>
+          </a:xfrm>
+          <a:prstGeom prst="rect">
+            <a:avLst/>
+          </a:prstGeom>
+          <a:noFill/>
+        </p:spPr>
+        <p:txBody>
+          <a:bodyPr wrap="square" lIns="0" rIns="0" tIns="0" bIns="0" anchor="t">
+            <a:normAutofit fontScale="100000" lnSpcReduction="0"/>
+          </a:bodyPr>
+          <a:lstStyle/>
+          <a:p>
+            <a:pPr>
+              <a:spcBef>
+                <a:spcPts val="0"/>
+              </a:spcBef>
+              <a:spcAft>
+                <a:spcPts val="0"/>
+              </a:spcAft>
+              <a:defRPr sz="1000" b="0">
+                <a:solidFill>
+                  <a:srgbClr val="D0002B"/>
+                </a:solidFill>
+                <a:latin typeface="Arial"/>
+              </a:defRPr>
+            </a:pPr>
+            <a:r>
+              <a:rPr sz="1000">
+                <a:solidFill>
+                  <a:srgbClr val="F7F8FC"/>
+                </a:solidFill>
+                <a:latin typeface="Arial"/>
+                <a:hlinkClick r:id="rId9"/>
+              </a:rPr>
+              <a:t>Quiz PDF</a:t>
             </a:r>
           </a:p>
         </p:txBody>
